--- a/app/agents/core_agents/template/탬플릿_화면설계서.pptx
+++ b/app/agents/core_agents/template/탬플릿_화면설계서.pptx
@@ -1902,7 +1902,7 @@
                 <a:ea typeface="KoPub돋움체 Medium" panose="00000600000000000000" pitchFamily="2" charset="-127"/>
               </a:rPr>
               <a:pPr/>
-              <a:t>2026. 5. 31.</a:t>
+              <a:t>2026. 6. 9.</a:t>
             </a:fld>
             <a:endParaRPr lang="ko-KR" altLang="en-US">
               <a:ea typeface="KoPub돋움체 Medium" panose="00000600000000000000" pitchFamily="2" charset="-127"/>
@@ -8903,14 +8903,14 @@
           <p:nvPr>
             <p:extLst>
               <p:ext uri="{D42A27DB-BD31-4B8C-83A1-F6EECF244321}">
-                <p14:modId xmlns:p14="http://schemas.microsoft.com/office/powerpoint/2010/main" val="703577472"/>
+                <p14:modId xmlns:p14="http://schemas.microsoft.com/office/powerpoint/2010/main" val="1173283765"/>
               </p:ext>
             </p:extLst>
           </p:nvPr>
         </p:nvGraphicFramePr>
         <p:xfrm>
           <a:off x="92077" y="58190"/>
-          <a:ext cx="9720001" cy="548640"/>
+          <a:ext cx="9720002" cy="548640"/>
         </p:xfrm>
         <a:graphic>
           <a:graphicData uri="http://schemas.openxmlformats.org/drawingml/2006/table">
@@ -8954,7 +8954,7 @@
                     </a:ext>
                   </a:extLst>
                 </a:gridCol>
-                <a:gridCol w="2174760">
+                <a:gridCol w="2174761">
                   <a:extLst>
                     <a:ext uri="{9D8B030D-6E8A-4147-A177-3AD203B41FA5}">
                       <a16:colId xmlns:a16="http://schemas.microsoft.com/office/drawing/2014/main" val="852965059"/>
@@ -9565,7 +9565,7 @@
                     </a:solidFill>
                   </a:tcPr>
                 </a:tc>
-                <a:tc>
+                <a:tc gridSpan="3">
                   <a:txBody>
                     <a:bodyPr/>
                     <a:lstStyle/>
@@ -9662,6 +9662,136 @@
                     <a:noFill/>
                   </a:tcPr>
                 </a:tc>
+                <a:tc hMerge="1">
+                  <a:txBody>
+                    <a:bodyPr/>
+                    <a:lstStyle/>
+                    <a:p>
+                      <a:pPr marL="0" algn="ctr" defTabSz="914395" rtl="0" eaLnBrk="1" latinLnBrk="1" hangingPunct="1"/>
+                      <a:endParaRPr lang="ko-KR" altLang="en-US" sz="1050" kern="1200" dirty="0">
+                        <a:solidFill>
+                          <a:schemeClr val="bg1"/>
+                        </a:solidFill>
+                        <a:latin typeface="KB금융 본문체 Bold" panose="020B0803000000000000" pitchFamily="50" charset="-127"/>
+                        <a:ea typeface="KB금융 본문체 Bold" panose="020B0803000000000000" pitchFamily="50" charset="-127"/>
+                        <a:cs typeface="+mn-cs"/>
+                      </a:endParaRPr>
+                    </a:p>
+                  </a:txBody>
+                  <a:tcPr anchor="ctr">
+                    <a:lnL w="12700" cap="flat" cmpd="sng" algn="ctr">
+                      <a:solidFill>
+                        <a:schemeClr val="tx1"/>
+                      </a:solidFill>
+                      <a:prstDash val="solid"/>
+                      <a:round/>
+                      <a:headEnd type="none" w="med" len="med"/>
+                      <a:tailEnd type="none" w="med" len="med"/>
+                    </a:lnL>
+                    <a:lnR w="12700" cap="flat" cmpd="sng" algn="ctr">
+                      <a:solidFill>
+                        <a:schemeClr val="tx1"/>
+                      </a:solidFill>
+                      <a:prstDash val="solid"/>
+                      <a:round/>
+                      <a:headEnd type="none" w="med" len="med"/>
+                      <a:tailEnd type="none" w="med" len="med"/>
+                    </a:lnR>
+                    <a:lnT w="12700" cap="flat" cmpd="sng" algn="ctr">
+                      <a:solidFill>
+                        <a:schemeClr val="tx1"/>
+                      </a:solidFill>
+                      <a:prstDash val="solid"/>
+                      <a:round/>
+                      <a:headEnd type="none" w="med" len="med"/>
+                      <a:tailEnd type="none" w="med" len="med"/>
+                    </a:lnT>
+                    <a:lnB w="12700" cap="flat" cmpd="sng" algn="ctr">
+                      <a:solidFill>
+                        <a:schemeClr val="tx1"/>
+                      </a:solidFill>
+                      <a:prstDash val="solid"/>
+                      <a:round/>
+                      <a:headEnd type="none" w="med" len="med"/>
+                      <a:tailEnd type="none" w="med" len="med"/>
+                    </a:lnB>
+                    <a:lnTlToBr w="12700" cmpd="sng">
+                      <a:noFill/>
+                      <a:prstDash val="solid"/>
+                    </a:lnTlToBr>
+                    <a:lnBlToTr w="12700" cmpd="sng">
+                      <a:noFill/>
+                      <a:prstDash val="solid"/>
+                    </a:lnBlToTr>
+                    <a:solidFill>
+                      <a:srgbClr val="755500"/>
+                    </a:solidFill>
+                  </a:tcPr>
+                </a:tc>
+                <a:tc hMerge="1">
+                  <a:txBody>
+                    <a:bodyPr/>
+                    <a:lstStyle/>
+                    <a:p>
+                      <a:pPr marL="0" algn="l" defTabSz="914395" rtl="0" eaLnBrk="1" latinLnBrk="1" hangingPunct="1"/>
+                      <a:endParaRPr lang="ko-KR" altLang="en-US" sz="1050" kern="1200" dirty="0">
+                        <a:solidFill>
+                          <a:schemeClr val="tx1"/>
+                        </a:solidFill>
+                        <a:latin typeface="KB금융 본문체 Bold" panose="020B0803000000000000" pitchFamily="50" charset="-127"/>
+                        <a:ea typeface="KB금융 본문체 Bold" panose="020B0803000000000000" pitchFamily="50" charset="-127"/>
+                        <a:cs typeface="+mn-cs"/>
+                      </a:endParaRPr>
+                    </a:p>
+                  </a:txBody>
+                  <a:tcPr anchor="ctr">
+                    <a:lnL w="12700" cap="flat" cmpd="sng" algn="ctr">
+                      <a:solidFill>
+                        <a:schemeClr val="tx1"/>
+                      </a:solidFill>
+                      <a:prstDash val="solid"/>
+                      <a:round/>
+                      <a:headEnd type="none" w="med" len="med"/>
+                      <a:tailEnd type="none" w="med" len="med"/>
+                    </a:lnL>
+                    <a:lnR w="12700" cap="flat" cmpd="sng" algn="ctr">
+                      <a:solidFill>
+                        <a:schemeClr val="tx1"/>
+                      </a:solidFill>
+                      <a:prstDash val="solid"/>
+                      <a:round/>
+                      <a:headEnd type="none" w="med" len="med"/>
+                      <a:tailEnd type="none" w="med" len="med"/>
+                    </a:lnR>
+                    <a:lnT w="12700" cap="flat" cmpd="sng" algn="ctr">
+                      <a:solidFill>
+                        <a:schemeClr val="tx1"/>
+                      </a:solidFill>
+                      <a:prstDash val="solid"/>
+                      <a:round/>
+                      <a:headEnd type="none" w="med" len="med"/>
+                      <a:tailEnd type="none" w="med" len="med"/>
+                    </a:lnT>
+                    <a:lnB w="12700" cap="flat" cmpd="sng" algn="ctr">
+                      <a:solidFill>
+                        <a:schemeClr val="tx1"/>
+                      </a:solidFill>
+                      <a:prstDash val="solid"/>
+                      <a:round/>
+                      <a:headEnd type="none" w="med" len="med"/>
+                      <a:tailEnd type="none" w="med" len="med"/>
+                    </a:lnB>
+                    <a:lnTlToBr w="12700" cmpd="sng">
+                      <a:noFill/>
+                      <a:prstDash val="solid"/>
+                    </a:lnTlToBr>
+                    <a:lnBlToTr w="12700" cmpd="sng">
+                      <a:noFill/>
+                      <a:prstDash val="solid"/>
+                    </a:lnBlToTr>
+                    <a:noFill/>
+                  </a:tcPr>
+                </a:tc>
                 <a:tc>
                   <a:txBody>
                     <a:bodyPr/>
@@ -9731,7 +9861,7 @@
                     </a:solidFill>
                   </a:tcPr>
                 </a:tc>
-                <a:tc gridSpan="3">
+                <a:tc>
                   <a:txBody>
                     <a:bodyPr/>
                     <a:lstStyle/>
@@ -9827,28 +9957,6 @@
                     </a:lnBlToTr>
                     <a:noFill/>
                   </a:tcPr>
-                </a:tc>
-                <a:tc hMerge="1">
-                  <a:txBody>
-                    <a:bodyPr/>
-                    <a:lstStyle/>
-                    <a:p>
-                      <a:pPr latinLnBrk="1"/>
-                      <a:endParaRPr lang="ko-KR" altLang="en-US"/>
-                    </a:p>
-                  </a:txBody>
-                  <a:tcPr/>
-                </a:tc>
-                <a:tc hMerge="1">
-                  <a:txBody>
-                    <a:bodyPr/>
-                    <a:lstStyle/>
-                    <a:p>
-                      <a:pPr latinLnBrk="1"/>
-                      <a:endParaRPr lang="ko-KR" altLang="en-US"/>
-                    </a:p>
-                  </a:txBody>
-                  <a:tcPr/>
                 </a:tc>
                 <a:extLst>
                   <a:ext uri="{0D108BD9-81ED-4DB2-BD59-A6C34878D82A}">
@@ -12593,6 +12701,23 @@
 </file>
 
 <file path=customXml/item1.xml><?xml version="1.0" encoding="utf-8"?>
+<p:properties xmlns:p="http://schemas.microsoft.com/office/2006/metadata/properties" xmlns:xsi="http://www.w3.org/2001/XMLSchema-instance" xmlns:pc="http://schemas.microsoft.com/office/infopath/2007/PartnerControls">
+  <documentManagement>
+    <_activity xmlns="5646ef5d-4f8d-4332-a844-395e5093eb07" xsi:nil="true"/>
+  </documentManagement>
+</p:properties>
+</file>
+
+<file path=customXml/item2.xml><?xml version="1.0" encoding="utf-8"?>
+<?mso-contentType ?>
+<FormTemplates xmlns="http://schemas.microsoft.com/sharepoint/v3/contenttype/forms">
+  <Display>DocumentLibraryForm</Display>
+  <Edit>DocumentLibraryForm</Edit>
+  <New>DocumentLibraryForm</New>
+</FormTemplates>
+</file>
+
+<file path=customXml/item3.xml><?xml version="1.0" encoding="utf-8"?>
 <ct:contentTypeSchema xmlns:ct="http://schemas.microsoft.com/office/2006/metadata/contentType" xmlns:ma="http://schemas.microsoft.com/office/2006/metadata/properties/metaAttributes" ct:_="" ma:_="" ma:contentTypeName="Document" ma:contentTypeID="0x010100B404B4CE4CA12F429AABBE641B9CCC0E" ma:contentTypeVersion="11" ma:contentTypeDescription="Create a new document." ma:contentTypeScope="" ma:versionID="c0b1d0d1127a22ecf8a5a81cfbdcaa50">
   <xsd:schema xmlns:xsd="http://www.w3.org/2001/XMLSchema" xmlns:xs="http://www.w3.org/2001/XMLSchema" xmlns:p="http://schemas.microsoft.com/office/2006/metadata/properties" xmlns:ns3="5646ef5d-4f8d-4332-a844-395e5093eb07" xmlns:ns4="c6904b36-efd8-494a-aa32-d9e929796570" targetNamespace="http://schemas.microsoft.com/office/2006/metadata/properties" ma:root="true" ma:fieldsID="e5710121105b2dbb76e0c29e758e35fe" ns3:_="" ns4:_="">
     <xsd:import namespace="5646ef5d-4f8d-4332-a844-395e5093eb07"/>
@@ -12801,24 +12926,32 @@
 </ct:contentTypeSchema>
 </file>
 
-<file path=customXml/item2.xml><?xml version="1.0" encoding="utf-8"?>
-<?mso-contentType ?>
-<FormTemplates xmlns="http://schemas.microsoft.com/sharepoint/v3/contenttype/forms">
-  <Display>DocumentLibraryForm</Display>
-  <Edit>DocumentLibraryForm</Edit>
-  <New>DocumentLibraryForm</New>
-</FormTemplates>
+<file path=customXml/itemProps1.xml><?xml version="1.0" encoding="utf-8"?>
+<ds:datastoreItem xmlns:ds="http://schemas.openxmlformats.org/officeDocument/2006/customXml" ds:itemID="{15A5E6DF-3655-452E-A02F-DF0A864F3FC1}">
+  <ds:schemaRefs>
+    <ds:schemaRef ds:uri="http://schemas.microsoft.com/office/2006/documentManagement/types"/>
+    <ds:schemaRef ds:uri="http://purl.org/dc/terms/"/>
+    <ds:schemaRef ds:uri="http://schemas.openxmlformats.org/package/2006/metadata/core-properties"/>
+    <ds:schemaRef ds:uri="5646ef5d-4f8d-4332-a844-395e5093eb07"/>
+    <ds:schemaRef ds:uri="http://purl.org/dc/dcmitype/"/>
+    <ds:schemaRef ds:uri="http://schemas.microsoft.com/office/infopath/2007/PartnerControls"/>
+    <ds:schemaRef ds:uri="http://purl.org/dc/elements/1.1/"/>
+    <ds:schemaRef ds:uri="http://schemas.microsoft.com/office/2006/metadata/properties"/>
+    <ds:schemaRef ds:uri="c6904b36-efd8-494a-aa32-d9e929796570"/>
+    <ds:schemaRef ds:uri="http://www.w3.org/XML/1998/namespace"/>
+  </ds:schemaRefs>
+</ds:datastoreItem>
 </file>
 
-<file path=customXml/item3.xml><?xml version="1.0" encoding="utf-8"?>
-<p:properties xmlns:p="http://schemas.microsoft.com/office/2006/metadata/properties" xmlns:xsi="http://www.w3.org/2001/XMLSchema-instance" xmlns:pc="http://schemas.microsoft.com/office/infopath/2007/PartnerControls">
-  <documentManagement>
-    <_activity xmlns="5646ef5d-4f8d-4332-a844-395e5093eb07" xsi:nil="true"/>
-  </documentManagement>
-</p:properties>
+<file path=customXml/itemProps2.xml><?xml version="1.0" encoding="utf-8"?>
+<ds:datastoreItem xmlns:ds="http://schemas.openxmlformats.org/officeDocument/2006/customXml" ds:itemID="{4CA8A526-87F2-43B5-9774-CC13372E7699}">
+  <ds:schemaRefs>
+    <ds:schemaRef ds:uri="http://schemas.microsoft.com/sharepoint/v3/contenttype/forms"/>
+  </ds:schemaRefs>
+</ds:datastoreItem>
 </file>
 
-<file path=customXml/itemProps1.xml><?xml version="1.0" encoding="utf-8"?>
+<file path=customXml/itemProps3.xml><?xml version="1.0" encoding="utf-8"?>
 <ds:datastoreItem xmlns:ds="http://schemas.openxmlformats.org/officeDocument/2006/customXml" ds:itemID="{5BA2E592-11D4-448E-BD92-A4E37812B37F}">
   <ds:schemaRefs>
     <ds:schemaRef ds:uri="5646ef5d-4f8d-4332-a844-395e5093eb07"/>
@@ -12837,31 +12970,6 @@
 </ds:datastoreItem>
 </file>
 
-<file path=customXml/itemProps2.xml><?xml version="1.0" encoding="utf-8"?>
-<ds:datastoreItem xmlns:ds="http://schemas.openxmlformats.org/officeDocument/2006/customXml" ds:itemID="{4CA8A526-87F2-43B5-9774-CC13372E7699}">
-  <ds:schemaRefs>
-    <ds:schemaRef ds:uri="http://schemas.microsoft.com/sharepoint/v3/contenttype/forms"/>
-  </ds:schemaRefs>
-</ds:datastoreItem>
-</file>
-
-<file path=customXml/itemProps3.xml><?xml version="1.0" encoding="utf-8"?>
-<ds:datastoreItem xmlns:ds="http://schemas.openxmlformats.org/officeDocument/2006/customXml" ds:itemID="{15A5E6DF-3655-452E-A02F-DF0A864F3FC1}">
-  <ds:schemaRefs>
-    <ds:schemaRef ds:uri="http://schemas.microsoft.com/office/2006/documentManagement/types"/>
-    <ds:schemaRef ds:uri="http://purl.org/dc/terms/"/>
-    <ds:schemaRef ds:uri="http://schemas.openxmlformats.org/package/2006/metadata/core-properties"/>
-    <ds:schemaRef ds:uri="5646ef5d-4f8d-4332-a844-395e5093eb07"/>
-    <ds:schemaRef ds:uri="http://purl.org/dc/dcmitype/"/>
-    <ds:schemaRef ds:uri="http://schemas.microsoft.com/office/infopath/2007/PartnerControls"/>
-    <ds:schemaRef ds:uri="http://purl.org/dc/elements/1.1/"/>
-    <ds:schemaRef ds:uri="http://schemas.microsoft.com/office/2006/metadata/properties"/>
-    <ds:schemaRef ds:uri="c6904b36-efd8-494a-aa32-d9e929796570"/>
-    <ds:schemaRef ds:uri="http://www.w3.org/XML/1998/namespace"/>
-  </ds:schemaRefs>
-</ds:datastoreItem>
-</file>
-
 <file path=docMetadata/LabelInfo.xml><?xml version="1.0" encoding="utf-8"?>
 <clbl:labelList xmlns:clbl="http://schemas.microsoft.com/office/2020/mipLabelMetadata">
   <clbl:label id="{deff24bb-2089-4400-8c8e-f71e680378b2}" enabled="0" method="" siteId="{deff24bb-2089-4400-8c8e-f71e680378b2}" removed="1"/>
